--- a/Reporte 240826.pptx
+++ b/Reporte 240826.pptx
@@ -6553,10 +6553,10 @@
       </p:sp>
       <p:pic>
         <p:nvPicPr>
-          <p:cNvPr id="4" name="Imagen 3">
+          <p:cNvPr id="5" name="Imagen 4">
             <a:extLst>
               <a:ext uri="{FF2B5EF4-FFF2-40B4-BE49-F238E27FC236}">
-                <a16:creationId xmlns:a16="http://schemas.microsoft.com/office/drawing/2014/main" id="{868608F1-BBE5-3158-07CA-AFA5D6A89738}"/>
+                <a16:creationId xmlns:a16="http://schemas.microsoft.com/office/drawing/2014/main" id="{75EA327C-1BCD-121F-D6AB-5DC7A8B773CA}"/>
               </a:ext>
             </a:extLst>
           </p:cNvPr>
@@ -6573,8 +6573,8 @@
         </p:blipFill>
         <p:spPr>
           <a:xfrm>
-            <a:off x="-6725" y="887055"/>
-            <a:ext cx="9144000" cy="3512265"/>
+            <a:off x="0" y="887730"/>
+            <a:ext cx="9144000" cy="3368040"/>
           </a:xfrm>
           <a:prstGeom prst="rect">
             <a:avLst/>
@@ -6659,10 +6659,10 @@
       </p:sp>
       <p:pic>
         <p:nvPicPr>
-          <p:cNvPr id="3" name="Imagen 2">
+          <p:cNvPr id="4" name="Imagen 3">
             <a:extLst>
               <a:ext uri="{FF2B5EF4-FFF2-40B4-BE49-F238E27FC236}">
-                <a16:creationId xmlns:a16="http://schemas.microsoft.com/office/drawing/2014/main" id="{DEBF90EC-7ECC-A7B5-CAD8-F5C541AF2074}"/>
+                <a16:creationId xmlns:a16="http://schemas.microsoft.com/office/drawing/2014/main" id="{7366FD91-37C7-55C3-220F-FC4025E74F53}"/>
               </a:ext>
             </a:extLst>
           </p:cNvPr>
@@ -6679,8 +6679,8 @@
         </p:blipFill>
         <p:spPr>
           <a:xfrm>
-            <a:off x="0" y="1303556"/>
-            <a:ext cx="9144000" cy="2679263"/>
+            <a:off x="0" y="1296988"/>
+            <a:ext cx="9144000" cy="2692400"/>
           </a:xfrm>
           <a:prstGeom prst="rect">
             <a:avLst/>
@@ -6765,10 +6765,10 @@
       </p:sp>
       <p:pic>
         <p:nvPicPr>
-          <p:cNvPr id="5" name="Imagen 4">
+          <p:cNvPr id="4" name="Imagen 3">
             <a:extLst>
               <a:ext uri="{FF2B5EF4-FFF2-40B4-BE49-F238E27FC236}">
-                <a16:creationId xmlns:a16="http://schemas.microsoft.com/office/drawing/2014/main" id="{0A9EC498-C067-8AFD-AC23-6F4F7B7BEF3D}"/>
+                <a16:creationId xmlns:a16="http://schemas.microsoft.com/office/drawing/2014/main" id="{39DD9CCA-9BBE-B4EA-029E-A2472A421B7B}"/>
               </a:ext>
             </a:extLst>
           </p:cNvPr>
@@ -6785,8 +6785,8 @@
         </p:blipFill>
         <p:spPr>
           <a:xfrm>
-            <a:off x="0" y="1015386"/>
-            <a:ext cx="9144000" cy="3255603"/>
+            <a:off x="0" y="1056984"/>
+            <a:ext cx="9144000" cy="3172408"/>
           </a:xfrm>
           <a:prstGeom prst="rect">
             <a:avLst/>
@@ -6871,10 +6871,10 @@
       </p:sp>
       <p:pic>
         <p:nvPicPr>
-          <p:cNvPr id="3" name="Imagen 2">
+          <p:cNvPr id="4" name="Imagen 3">
             <a:extLst>
               <a:ext uri="{FF2B5EF4-FFF2-40B4-BE49-F238E27FC236}">
-                <a16:creationId xmlns:a16="http://schemas.microsoft.com/office/drawing/2014/main" id="{3A85A8F9-BA00-C2FE-2FF4-31CBD9E73B4D}"/>
+                <a16:creationId xmlns:a16="http://schemas.microsoft.com/office/drawing/2014/main" id="{EE031829-7D83-2FA3-275A-D1F3330EE3E0}"/>
               </a:ext>
             </a:extLst>
           </p:cNvPr>
@@ -6891,8 +6891,8 @@
         </p:blipFill>
         <p:spPr>
           <a:xfrm>
-            <a:off x="0" y="1175739"/>
-            <a:ext cx="9144000" cy="2792022"/>
+            <a:off x="0" y="1236028"/>
+            <a:ext cx="9144000" cy="2814320"/>
           </a:xfrm>
           <a:prstGeom prst="rect">
             <a:avLst/>
@@ -6977,10 +6977,10 @@
       </p:sp>
       <p:pic>
         <p:nvPicPr>
-          <p:cNvPr id="3" name="Imagen 2">
+          <p:cNvPr id="4" name="Imagen 3">
             <a:extLst>
               <a:ext uri="{FF2B5EF4-FFF2-40B4-BE49-F238E27FC236}">
-                <a16:creationId xmlns:a16="http://schemas.microsoft.com/office/drawing/2014/main" id="{502A4F44-5EBD-AA60-DD10-BDEDFFF45E00}"/>
+                <a16:creationId xmlns:a16="http://schemas.microsoft.com/office/drawing/2014/main" id="{19115144-266E-E368-2513-75F21D9BB188}"/>
               </a:ext>
             </a:extLst>
           </p:cNvPr>
@@ -6997,8 +6997,8 @@
         </p:blipFill>
         <p:spPr>
           <a:xfrm>
-            <a:off x="0" y="698628"/>
-            <a:ext cx="9144000" cy="3889119"/>
+            <a:off x="0" y="696793"/>
+            <a:ext cx="9144000" cy="3892789"/>
           </a:xfrm>
           <a:prstGeom prst="rect">
             <a:avLst/>
@@ -7089,10 +7089,10 @@
       </p:sp>
       <p:pic>
         <p:nvPicPr>
-          <p:cNvPr id="4" name="Imagen 3">
+          <p:cNvPr id="3" name="Imagen 2">
             <a:extLst>
               <a:ext uri="{FF2B5EF4-FFF2-40B4-BE49-F238E27FC236}">
-                <a16:creationId xmlns:a16="http://schemas.microsoft.com/office/drawing/2014/main" id="{4F5270AC-B374-C138-D7C9-15F9BE90EE96}"/>
+                <a16:creationId xmlns:a16="http://schemas.microsoft.com/office/drawing/2014/main" id="{CEC554CF-2C26-3B0B-2D0C-75F06B9794E8}"/>
               </a:ext>
             </a:extLst>
           </p:cNvPr>
@@ -7109,8 +7109,8 @@
         </p:blipFill>
         <p:spPr>
           <a:xfrm>
-            <a:off x="0" y="1123983"/>
-            <a:ext cx="9144000" cy="3038409"/>
+            <a:off x="0" y="1135774"/>
+            <a:ext cx="9144000" cy="3014827"/>
           </a:xfrm>
           <a:prstGeom prst="rect">
             <a:avLst/>
